--- a/prompter-moscow/presentation/prompter-predstavlenie-kompanii.pptx
+++ b/prompter-moscow/presentation/prompter-predstavlenie-kompanii.pptx
@@ -7451,7 +7451,7 @@
                 <a:latin typeface="MiSans"/>
                 <a:ea typeface="MiSans"/>
               </a:rPr>
-              <a:t>Технология Промптера берёт на себя полный цикл GEO- и SEO-продвижения: создаёт контент о бизнесе клиента и автоматически публикует его на отечественных площадках. Цифровой след наращивается каждый день — его считывают нейросети и поисковики.</a:t>
+              <a:t>Технология Промптера берёт на себя полный цикл GEO- и SEO-продвижения: создаёт контент о бизнесе клиента и автоматически публикует его на шести площадках. Цифровой след наращивается каждый день — его считывают нейросети и поисковики.</a:t>
             </a:r>
             <a:endParaRPr lang="en-US" sz="1400"/>
           </a:p>
@@ -8982,7 +8982,7 @@
                 <a:latin typeface="MiSans"/>
                 <a:ea typeface="MiSans"/>
               </a:rPr>
-              <a:t>Материалы автоматически выходят на отечественных площадках 5 дней в неделю</a:t>
+              <a:t>Материалы автоматически выходят на шести площадках 5 дней в неделю</a:t>
             </a:r>
             <a:endParaRPr lang="en-US" sz="1100"/>
           </a:p>
@@ -13190,7 +13190,7 @@
                 <a:latin typeface="MiSans"/>
                 <a:ea typeface="MiSans"/>
               </a:rPr>
-              <a:t>4 отечественные площадки</a:t>
+              <a:t>6 площадок для публикаций</a:t>
             </a:r>
             <a:r>
               <a:rPr lang="ru-RU" sz="1350" b="1" dirty="0">
@@ -13618,7 +13618,7 @@
                 <a:latin typeface="MiSans"/>
                 <a:ea typeface="MiSans"/>
               </a:rPr>
-              <a:t>* Все работы выполняются в строгом соответствии с законодательством Российской Федерации. Договор и закрывающие документы предоставляются.</a:t>
+              <a:t>* Все работы выполняются в строгом соответствии с законодательством Российской Федерации. Договор и закрывающие документы предоставляются. Instagram принадлежит компании Meta, признанной экстремистской организацией и запрещённой на территории Российской Федерации.</a:t>
             </a:r>
             <a:endParaRPr lang="en-US" sz="1050"/>
           </a:p>

--- a/prompter-moscow/presentation/prompter-predstavlenie-kompanii.pptx
+++ b/prompter-moscow/presentation/prompter-predstavlenie-kompanii.pptx
@@ -13190,7 +13190,7 @@
                 <a:latin typeface="MiSans"/>
                 <a:ea typeface="MiSans"/>
               </a:rPr>
-              <a:t>6 площадок для публикаций</a:t>
+              <a:t>6 площадок для автопубликации</a:t>
             </a:r>
             <a:r>
               <a:rPr lang="ru-RU" sz="1350" b="1" dirty="0">

--- a/prompter-moscow/presentation/prompter-predstavlenie-kompanii.pptx
+++ b/prompter-moscow/presentation/prompter-predstavlenie-kompanii.pptx
@@ -13420,7 +13420,7 @@
                 <a:latin typeface="MiSans"/>
                 <a:ea typeface="MiSans"/>
               </a:rPr>
-              <a:t>На зарубежных площадках (</a:t>
+              <a:t>На других площадках (</a:t>
             </a:r>
             <a:r>
               <a:rPr lang="en-US" sz="1150" dirty="0" err="1">
@@ -13430,7 +13430,7 @@
                 <a:latin typeface="MiSans"/>
                 <a:ea typeface="MiSans"/>
               </a:rPr>
-              <a:t>instag</a:t>
+              <a:t>whatsapp</a:t>
             </a:r>
             <a:r>
               <a:rPr lang="en-US" sz="1150" dirty="0">
@@ -13450,7 +13450,7 @@
                 <a:latin typeface="MiSans"/>
                 <a:ea typeface="MiSans"/>
               </a:rPr>
-              <a:t>tg</a:t>
+              <a:t>youtube</a:t>
             </a:r>
             <a:r>
               <a:rPr lang="en-US" sz="1150" dirty="0">
@@ -13470,7 +13470,7 @@
                 <a:latin typeface="MiSans"/>
                 <a:ea typeface="MiSans"/>
               </a:rPr>
-              <a:t>whatsapp,youtube</a:t>
+              <a:t>блоги</a:t>
             </a:r>
             <a:r>
               <a:rPr lang="en-US" sz="1150" dirty="0">
@@ -13510,7 +13510,7 @@
                 <a:latin typeface="MiSans"/>
                 <a:ea typeface="MiSans"/>
               </a:rPr>
-              <a:t> вы сами публикуете контент сгенерированный </a:t>
+              <a:t> вы сами публикуете контент, сгенерированный </a:t>
             </a:r>
             <a:r>
               <a:rPr lang="ru-RU" sz="1150" dirty="0" err="1">
